--- a/site/clases/parte-2-deep-learning/169-tf-lite-mobile-embedded/clase-169-tf-lite-mobile-embedded-presentacion.pptx
+++ b/site/clases/parte-2-deep-learning/169-tf-lite-mobile-embedded/clase-169-tf-lite-mobile-embedded-presentacion.pptx
@@ -3272,7 +3272,7 @@
                 </a:solidFill>
                 <a:latin typeface="Segoe UI"/>
               </a:rPr>
-              <a:t>Parte: 2 — Deep Learning · Fuente: Géron, cap. 19 § Deploying a Model to a Mobile or Embedded Device.  Duración estimada: 55 min.</a:t>
+              <a:t>Parte: 2 — Deep Learning · Fuente: Géron, cap. 19 § Deploying a Model to a Mobile or Embedded Device.  Duración estimada: 55 min. · Nivel: Avanzado</a:t>
             </a:r>
           </a:p>
         </p:txBody>
@@ -3581,7 +3581,7 @@
                 </a:solidFill>
                 <a:latin typeface="Segoe UI"/>
               </a:rPr>
-              <a:t>Parte: 2 — Deep Learning · Fuente: Géron, cap. 19 § Deploying a Model to a Mobile or Embedded Device.  Duración estimada: 55 min.</a:t>
+              <a:t>Parte: 2 — Deep Learning · Fuente: Géron, cap. 19 § Deploying a Model to a Mobile or Embedded Device.  Duración estimada: 55 min. · Nivel: Avanzado</a:t>
             </a:r>
           </a:p>
         </p:txBody>
@@ -4888,7 +4888,292 @@
                 </a:solidFill>
                 <a:latin typeface="Courier New"/>
               </a:rPr>
-              <a:t># Imports y configuración inicial</a:t>
+              <a:t>try:</a:t>
+            </a:r>
+          </a:p>
+          <a:p>
+            <a:pPr>
+              <a:defRPr sz="1200" b="0">
+                <a:solidFill>
+                  <a:srgbClr val="F8FAFC"/>
+                </a:solidFill>
+                <a:latin typeface="Courier New"/>
+              </a:defRPr>
+            </a:pPr>
+            <a:r>
+              <a:rPr sz="1200" b="0">
+                <a:solidFill>
+                  <a:srgbClr val="F8FAFC"/>
+                </a:solidFill>
+                <a:latin typeface="Courier New"/>
+              </a:rPr>
+              <a:t>    import tensorflow as tf</a:t>
+            </a:r>
+          </a:p>
+          <a:p>
+            <a:pPr>
+              <a:defRPr sz="1200" b="0">
+                <a:solidFill>
+                  <a:srgbClr val="F8FAFC"/>
+                </a:solidFill>
+                <a:latin typeface="Courier New"/>
+              </a:defRPr>
+            </a:pPr>
+            <a:r>
+              <a:rPr sz="1200" b="0">
+                <a:solidFill>
+                  <a:srgbClr val="F8FAFC"/>
+                </a:solidFill>
+                <a:latin typeface="Courier New"/>
+              </a:rPr>
+              <a:t>    from tensorflow import keras</a:t>
+            </a:r>
+          </a:p>
+          <a:p>
+            <a:pPr>
+              <a:defRPr sz="1200" b="0">
+                <a:solidFill>
+                  <a:srgbClr val="F8FAFC"/>
+                </a:solidFill>
+                <a:latin typeface="Courier New"/>
+              </a:defRPr>
+            </a:pPr>
+            <a:r>
+              <a:rPr sz="1200" b="0">
+                <a:solidFill>
+                  <a:srgbClr val="F8FAFC"/>
+                </a:solidFill>
+                <a:latin typeface="Courier New"/>
+              </a:rPr>
+              <a:t>    TF_OK = True</a:t>
+            </a:r>
+          </a:p>
+          <a:p>
+            <a:pPr>
+              <a:defRPr sz="1200" b="0">
+                <a:solidFill>
+                  <a:srgbClr val="F8FAFC"/>
+                </a:solidFill>
+                <a:latin typeface="Courier New"/>
+              </a:defRPr>
+            </a:pPr>
+            <a:r>
+              <a:rPr sz="1200" b="0">
+                <a:solidFill>
+                  <a:srgbClr val="F8FAFC"/>
+                </a:solidFill>
+                <a:latin typeface="Courier New"/>
+              </a:rPr>
+              <a:t>except Exception:</a:t>
+            </a:r>
+          </a:p>
+          <a:p>
+            <a:pPr>
+              <a:defRPr sz="1200" b="0">
+                <a:solidFill>
+                  <a:srgbClr val="F8FAFC"/>
+                </a:solidFill>
+                <a:latin typeface="Courier New"/>
+              </a:defRPr>
+            </a:pPr>
+            <a:r>
+              <a:rPr sz="1200" b="0">
+                <a:solidFill>
+                  <a:srgbClr val="F8FAFC"/>
+                </a:solidFill>
+                <a:latin typeface="Courier New"/>
+              </a:rPr>
+              <a:t>    TF_OK = False</a:t>
+            </a:r>
+          </a:p>
+          <a:p>
+            <a:pPr>
+              <a:defRPr sz="1200" b="0">
+                <a:solidFill>
+                  <a:srgbClr val="F8FAFC"/>
+                </a:solidFill>
+                <a:latin typeface="Courier New"/>
+              </a:defRPr>
+            </a:pPr>
+            <a:r>
+              <a:rPr sz="1200" b="0">
+                <a:solidFill>
+                  <a:srgbClr val="F8FAFC"/>
+                </a:solidFill>
+                <a:latin typeface="Courier New"/>
+              </a:rPr>
+              <a:t>    print("tensorflow no instalado -&gt; se muestra la API de conversion (no se ejecuta)")</a:t>
+            </a:r>
+          </a:p>
+          <a:p>
+            <a:pPr>
+              <a:defRPr sz="1200" b="0">
+                <a:solidFill>
+                  <a:srgbClr val="F8FAFC"/>
+                </a:solidFill>
+                <a:latin typeface="Courier New"/>
+              </a:defRPr>
+            </a:pPr>
+            <a:r>
+              <a:rPr sz="1200" b="0">
+                <a:solidFill>
+                  <a:srgbClr val="F8FAFC"/>
+                </a:solidFill>
+                <a:latin typeface="Courier New"/>
+              </a:rPr>
+              <a:t> </a:t>
+            </a:r>
+          </a:p>
+          <a:p>
+            <a:pPr>
+              <a:defRPr sz="1200" b="0">
+                <a:solidFill>
+                  <a:srgbClr val="F8FAFC"/>
+                </a:solidFill>
+                <a:latin typeface="Courier New"/>
+              </a:defRPr>
+            </a:pPr>
+            <a:r>
+              <a:rPr sz="1200" b="0">
+                <a:solidFill>
+                  <a:srgbClr val="F8FAFC"/>
+                </a:solidFill>
+                <a:latin typeface="Courier New"/>
+              </a:rPr>
+              <a:t>if TF_OK:</a:t>
+            </a:r>
+          </a:p>
+          <a:p>
+            <a:pPr>
+              <a:defRPr sz="1200" b="0">
+                <a:solidFill>
+                  <a:srgbClr val="F8FAFC"/>
+                </a:solidFill>
+                <a:latin typeface="Courier New"/>
+              </a:defRPr>
+            </a:pPr>
+            <a:r>
+              <a:rPr sz="1200" b="0">
+                <a:solidFill>
+                  <a:srgbClr val="F8FAFC"/>
+                </a:solidFill>
+                <a:latin typeface="Courier New"/>
+              </a:rPr>
+              <a:t>    converter = tf.lite.TFLiteConverter.from_saved_model("servable/1/")</a:t>
+            </a:r>
+          </a:p>
+          <a:p>
+            <a:pPr>
+              <a:defRPr sz="1200" b="0">
+                <a:solidFill>
+                  <a:srgbClr val="F8FAFC"/>
+                </a:solidFill>
+                <a:latin typeface="Courier New"/>
+              </a:defRPr>
+            </a:pPr>
+            <a:r>
+              <a:rPr sz="1200" b="0">
+                <a:solidFill>
+                  <a:srgbClr val="F8FAFC"/>
+                </a:solidFill>
+                <a:latin typeface="Courier New"/>
+              </a:rPr>
+              <a:t>    tflite_model = converter.convert()</a:t>
+            </a:r>
+          </a:p>
+          <a:p>
+            <a:pPr>
+              <a:defRPr sz="1200" b="0">
+                <a:solidFill>
+                  <a:srgbClr val="F8FAFC"/>
+                </a:solidFill>
+                <a:latin typeface="Courier New"/>
+              </a:defRPr>
+            </a:pPr>
+            <a:r>
+              <a:rPr sz="1200" b="0">
+                <a:solidFill>
+                  <a:srgbClr val="F8FAFC"/>
+                </a:solidFill>
+                <a:latin typeface="Courier New"/>
+              </a:rPr>
+              <a:t>    open("model.tflite", "wb").write(tflite_model)</a:t>
+            </a:r>
+          </a:p>
+          <a:p>
+            <a:pPr>
+              <a:defRPr sz="1200" b="0">
+                <a:solidFill>
+                  <a:srgbClr val="F8FAFC"/>
+                </a:solidFill>
+                <a:latin typeface="Courier New"/>
+              </a:defRPr>
+            </a:pPr>
+            <a:r>
+              <a:rPr sz="1200" b="0">
+                <a:solidFill>
+                  <a:srgbClr val="F8FAFC"/>
+                </a:solidFill>
+                <a:latin typeface="Courier New"/>
+              </a:rPr>
+              <a:t>    print(f"model.tflite: {len(tflite_model)} bytes (float32)")</a:t>
+            </a:r>
+          </a:p>
+          <a:p>
+            <a:pPr>
+              <a:defRPr sz="1200" b="0">
+                <a:solidFill>
+                  <a:srgbClr val="F8FAFC"/>
+                </a:solidFill>
+                <a:latin typeface="Courier New"/>
+              </a:defRPr>
+            </a:pPr>
+            <a:r>
+              <a:rPr sz="1200" b="0">
+                <a:solidFill>
+                  <a:srgbClr val="F8FAFC"/>
+                </a:solidFill>
+                <a:latin typeface="Courier New"/>
+              </a:rPr>
+              <a:t>else:</a:t>
+            </a:r>
+          </a:p>
+          <a:p>
+            <a:pPr>
+              <a:defRPr sz="1200" b="0">
+                <a:solidFill>
+                  <a:srgbClr val="F8FAFC"/>
+                </a:solidFill>
+                <a:latin typeface="Courier New"/>
+              </a:defRPr>
+            </a:pPr>
+            <a:r>
+              <a:rPr sz="1200" b="0">
+                <a:solidFill>
+                  <a:srgbClr val="F8FAFC"/>
+                </a:solidFill>
+                <a:latin typeface="Courier New"/>
+              </a:rPr>
+              <a:t>    print("converter = tf.lite.TFLiteConverter.from_saved_model('servable/1/')")</a:t>
+            </a:r>
+          </a:p>
+          <a:p>
+            <a:pPr>
+              <a:defRPr sz="1200" b="0">
+                <a:solidFill>
+                  <a:srgbClr val="F8FAFC"/>
+                </a:solidFill>
+                <a:latin typeface="Courier New"/>
+              </a:defRPr>
+            </a:pPr>
+            <a:r>
+              <a:rPr sz="1200" b="0">
+                <a:solidFill>
+                  <a:srgbClr val="F8FAFC"/>
+                </a:solidFill>
+                <a:latin typeface="Courier New"/>
+              </a:rPr>
+              <a:t>    print("tflite_model = converter.convert()")</a:t>
             </a:r>
           </a:p>
         </p:txBody>
